--- a/output/燕京中发尽调报告/燕京中发业务架构调整方案-架构调整前后对比.pptx
+++ b/output/燕京中发尽调报告/燕京中发业务架构调整方案-架构调整前后对比.pptx
@@ -3096,8 +3096,8 @@
         </p:nvSpPr>
         <p:spPr>
           <a:xfrm>
-            <a:off x="360000" y="198000"/>
-            <a:ext cx="11520000" cy="360000"/>
+            <a:off x="360000" y="151200"/>
+            <a:ext cx="8640000" cy="342000"/>
           </a:xfrm>
           <a:prstGeom prst="rect">
             <a:avLst/>
@@ -3123,15 +3123,50 @@
           </a:p>
         </p:txBody>
       </p:sp>
+      <p:sp>
+        <p:nvSpPr>
+          <p:cNvPr id="3" name="TextBox 2"/>
+          <p:cNvSpPr txBox="1"/>
+          <p:nvPr/>
+        </p:nvSpPr>
+        <p:spPr>
+          <a:xfrm>
+            <a:off x="360000" y="432000"/>
+            <a:ext cx="8640000" cy="198000"/>
+          </a:xfrm>
+          <a:prstGeom prst="rect">
+            <a:avLst/>
+          </a:prstGeom>
+          <a:noFill/>
+        </p:spPr>
+        <p:txBody>
+          <a:bodyPr wrap="square" lIns="18000" rIns="18000" tIns="0" bIns="0">
+            <a:spAutoFit/>
+          </a:bodyPr>
+          <a:lstStyle/>
+          <a:p>
+            <a:pPr algn="l"/>
+            <a:r>
+              <a:rPr sz="950" b="0">
+                <a:solidFill>
+                  <a:srgbClr val="888888"/>
+                </a:solidFill>
+                <a:latin typeface="微软雅黑"/>
+              </a:rPr>
+              <a:t>（土地事项按方案一「收购燕京啤酒（邢台）有限公司100%股权」列示）</a:t>
+            </a:r>
+          </a:p>
+        </p:txBody>
+      </p:sp>
       <p:cxnSp>
         <p:nvCxnSpPr>
-          <p:cNvPr id="3" name="Connector 2"/>
+          <p:cNvPr id="4" name="Connector 3"/>
           <p:cNvCxnSpPr/>
           <p:nvPr/>
         </p:nvCxnSpPr>
         <p:spPr>
           <a:xfrm>
-            <a:off x="360000" y="583200"/>
+            <a:off x="360000" y="666000"/>
             <a:ext cx="11376000" cy="0"/>
           </a:xfrm>
           <a:prstGeom prst="line">
@@ -3160,13 +3195,13 @@
       </p:cxnSp>
       <p:sp>
         <p:nvSpPr>
-          <p:cNvPr id="4" name="TextBox 3"/>
+          <p:cNvPr id="5" name="TextBox 4"/>
           <p:cNvSpPr txBox="1"/>
           <p:nvPr/>
         </p:nvSpPr>
         <p:spPr>
           <a:xfrm>
-            <a:off x="360000" y="630000"/>
+            <a:off x="360000" y="712800"/>
             <a:ext cx="5220000" cy="251999"/>
           </a:xfrm>
           <a:prstGeom prst="rect">
@@ -3195,13 +3230,13 @@
       </p:sp>
       <p:sp>
         <p:nvSpPr>
-          <p:cNvPr id="5" name="TextBox 4"/>
+          <p:cNvPr id="6" name="TextBox 5"/>
           <p:cNvSpPr txBox="1"/>
           <p:nvPr/>
         </p:nvSpPr>
         <p:spPr>
           <a:xfrm>
-            <a:off x="6983999" y="630000"/>
+            <a:off x="6983999" y="712800"/>
             <a:ext cx="4860000" cy="251999"/>
           </a:xfrm>
           <a:prstGeom prst="rect">
@@ -3230,13 +3265,13 @@
       </p:sp>
       <p:sp>
         <p:nvSpPr>
-          <p:cNvPr id="6" name="Rectangle 5"/>
+          <p:cNvPr id="7" name="Rectangle 6"/>
           <p:cNvSpPr/>
           <p:nvPr/>
         </p:nvSpPr>
         <p:spPr>
           <a:xfrm>
-            <a:off x="360000" y="972000"/>
+            <a:off x="360000" y="1062000"/>
             <a:ext cx="1440000" cy="378000"/>
           </a:xfrm>
           <a:prstGeom prst="rect">
@@ -3295,13 +3330,13 @@
       </p:sp>
       <p:sp>
         <p:nvSpPr>
-          <p:cNvPr id="7" name="Rectangle 6"/>
+          <p:cNvPr id="8" name="Rectangle 7"/>
           <p:cNvSpPr/>
           <p:nvPr/>
         </p:nvSpPr>
         <p:spPr>
           <a:xfrm>
-            <a:off x="2015999" y="972000"/>
+            <a:off x="2015999" y="1062000"/>
             <a:ext cx="1260000" cy="378000"/>
           </a:xfrm>
           <a:prstGeom prst="rect">
@@ -3348,13 +3383,13 @@
       </p:sp>
       <p:sp>
         <p:nvSpPr>
-          <p:cNvPr id="8" name="Rectangle 7"/>
+          <p:cNvPr id="9" name="Rectangle 8"/>
           <p:cNvSpPr/>
           <p:nvPr/>
         </p:nvSpPr>
         <p:spPr>
           <a:xfrm>
-            <a:off x="3491999" y="972000"/>
+            <a:off x="3491999" y="1062000"/>
             <a:ext cx="1512000" cy="378000"/>
           </a:xfrm>
           <a:prstGeom prst="rect">
@@ -3413,49 +3448,14 @@
       </p:sp>
       <p:cxnSp>
         <p:nvCxnSpPr>
-          <p:cNvPr id="9" name="Connector 8"/>
-          <p:cNvCxnSpPr/>
-          <p:nvPr/>
-        </p:nvCxnSpPr>
-        <p:spPr>
-          <a:xfrm>
-            <a:off x="1080000" y="1565999"/>
-            <a:ext cx="3168000" cy="0"/>
-          </a:xfrm>
-          <a:prstGeom prst="line">
-            <a:avLst/>
-          </a:prstGeom>
-          <a:ln w="15875">
-            <a:solidFill>
-              <a:srgbClr val="595959"/>
-            </a:solidFill>
-          </a:ln>
-        </p:spPr>
-        <p:style>
-          <a:lnRef idx="2">
-            <a:schemeClr val="accent1"/>
-          </a:lnRef>
-          <a:fillRef idx="0">
-            <a:schemeClr val="accent1"/>
-          </a:fillRef>
-          <a:effectRef idx="1">
-            <a:schemeClr val="accent1"/>
-          </a:effectRef>
-          <a:fontRef idx="minor">
-            <a:schemeClr val="tx1"/>
-          </a:fontRef>
-        </p:style>
-      </p:cxnSp>
-      <p:cxnSp>
-        <p:nvCxnSpPr>
           <p:cNvPr id="10" name="Connector 9"/>
           <p:cNvCxnSpPr/>
           <p:nvPr/>
         </p:nvCxnSpPr>
         <p:spPr>
           <a:xfrm>
-            <a:off x="1080000" y="1350000"/>
-            <a:ext cx="0" cy="215999"/>
+            <a:off x="1080000" y="1638000"/>
+            <a:ext cx="3168000" cy="0"/>
           </a:xfrm>
           <a:prstGeom prst="line">
             <a:avLst/>
@@ -3489,8 +3489,8 @@
         </p:nvCxnSpPr>
         <p:spPr>
           <a:xfrm>
-            <a:off x="2646000" y="1350000"/>
-            <a:ext cx="0" cy="215999"/>
+            <a:off x="1080000" y="1440000"/>
+            <a:ext cx="0" cy="198000"/>
           </a:xfrm>
           <a:prstGeom prst="line">
             <a:avLst/>
@@ -3524,373 +3524,8 @@
         </p:nvCxnSpPr>
         <p:spPr>
           <a:xfrm>
-            <a:off x="4248000" y="1350000"/>
-            <a:ext cx="0" cy="215999"/>
-          </a:xfrm>
-          <a:prstGeom prst="line">
-            <a:avLst/>
-          </a:prstGeom>
-          <a:ln w="15875">
-            <a:solidFill>
-              <a:srgbClr val="595959"/>
-            </a:solidFill>
-          </a:ln>
-        </p:spPr>
-        <p:style>
-          <a:lnRef idx="2">
-            <a:schemeClr val="accent1"/>
-          </a:lnRef>
-          <a:fillRef idx="0">
-            <a:schemeClr val="accent1"/>
-          </a:fillRef>
-          <a:effectRef idx="1">
-            <a:schemeClr val="accent1"/>
-          </a:effectRef>
-          <a:fontRef idx="minor">
-            <a:schemeClr val="tx1"/>
-          </a:fontRef>
-        </p:style>
-      </p:cxnSp>
-      <p:sp>
-        <p:nvSpPr>
-          <p:cNvPr id="13" name="TextBox 12"/>
-          <p:cNvSpPr txBox="1"/>
-          <p:nvPr/>
-        </p:nvSpPr>
-        <p:spPr>
-          <a:xfrm>
-            <a:off x="1134000" y="1368000"/>
-            <a:ext cx="720000" cy="180000"/>
-          </a:xfrm>
-          <a:prstGeom prst="rect">
-            <a:avLst/>
-          </a:prstGeom>
-          <a:noFill/>
-        </p:spPr>
-        <p:txBody>
-          <a:bodyPr wrap="square" lIns="18000" rIns="18000" tIns="0" bIns="0">
-            <a:spAutoFit/>
-          </a:bodyPr>
-          <a:lstStyle/>
-          <a:p>
-            <a:pPr algn="l"/>
-            <a:r>
-              <a:rPr sz="900" b="1">
-                <a:solidFill>
-                  <a:srgbClr val="333333"/>
-                </a:solidFill>
-                <a:latin typeface="微软雅黑"/>
-              </a:rPr>
-              <a:t>80%</a:t>
-            </a:r>
-          </a:p>
-        </p:txBody>
-      </p:sp>
-      <p:sp>
-        <p:nvSpPr>
-          <p:cNvPr id="14" name="TextBox 13"/>
-          <p:cNvSpPr txBox="1"/>
-          <p:nvPr/>
-        </p:nvSpPr>
-        <p:spPr>
-          <a:xfrm>
-            <a:off x="2700000" y="1368000"/>
-            <a:ext cx="792000" cy="180000"/>
-          </a:xfrm>
-          <a:prstGeom prst="rect">
-            <a:avLst/>
-          </a:prstGeom>
-          <a:noFill/>
-        </p:spPr>
-        <p:txBody>
-          <a:bodyPr wrap="square" lIns="18000" rIns="18000" tIns="0" bIns="0">
-            <a:spAutoFit/>
-          </a:bodyPr>
-          <a:lstStyle/>
-          <a:p>
-            <a:pPr algn="l"/>
-            <a:r>
-              <a:rPr sz="900" b="1">
-                <a:solidFill>
-                  <a:srgbClr val="333333"/>
-                </a:solidFill>
-                <a:latin typeface="微软雅黑"/>
-              </a:rPr>
-              <a:t>17.5%</a:t>
-            </a:r>
-          </a:p>
-        </p:txBody>
-      </p:sp>
-      <p:sp>
-        <p:nvSpPr>
-          <p:cNvPr id="15" name="TextBox 14"/>
-          <p:cNvSpPr txBox="1"/>
-          <p:nvPr/>
-        </p:nvSpPr>
-        <p:spPr>
-          <a:xfrm>
-            <a:off x="4302000" y="1368000"/>
-            <a:ext cx="720000" cy="180000"/>
-          </a:xfrm>
-          <a:prstGeom prst="rect">
-            <a:avLst/>
-          </a:prstGeom>
-          <a:noFill/>
-        </p:spPr>
-        <p:txBody>
-          <a:bodyPr wrap="square" lIns="18000" rIns="18000" tIns="0" bIns="0">
-            <a:spAutoFit/>
-          </a:bodyPr>
-          <a:lstStyle/>
-          <a:p>
-            <a:pPr algn="l"/>
-            <a:r>
-              <a:rPr sz="900" b="1">
-                <a:solidFill>
-                  <a:srgbClr val="333333"/>
-                </a:solidFill>
-                <a:latin typeface="微软雅黑"/>
-              </a:rPr>
-              <a:t>2.5%</a:t>
-            </a:r>
-          </a:p>
-        </p:txBody>
-      </p:sp>
-      <p:cxnSp>
-        <p:nvCxnSpPr>
-          <p:cNvPr id="16" name="Connector 15"/>
-          <p:cNvCxnSpPr/>
-          <p:nvPr/>
-        </p:nvCxnSpPr>
-        <p:spPr>
-          <a:xfrm>
-            <a:off x="2646000" y="1565999"/>
-            <a:ext cx="0" cy="252001"/>
-          </a:xfrm>
-          <a:prstGeom prst="line">
-            <a:avLst/>
-          </a:prstGeom>
-          <a:ln w="15875">
-            <a:solidFill>
-              <a:srgbClr val="595959"/>
-            </a:solidFill>
-            <a:tailEnd type="triangle" w="med" len="med"/>
-          </a:ln>
-        </p:spPr>
-        <p:style>
-          <a:lnRef idx="2">
-            <a:schemeClr val="accent1"/>
-          </a:lnRef>
-          <a:fillRef idx="0">
-            <a:schemeClr val="accent1"/>
-          </a:fillRef>
-          <a:effectRef idx="1">
-            <a:schemeClr val="accent1"/>
-          </a:effectRef>
-          <a:fontRef idx="minor">
-            <a:schemeClr val="tx1"/>
-          </a:fontRef>
-        </p:style>
-      </p:cxnSp>
-      <p:sp>
-        <p:nvSpPr>
-          <p:cNvPr id="17" name="Rectangle 16"/>
-          <p:cNvSpPr/>
-          <p:nvPr/>
-        </p:nvSpPr>
-        <p:spPr>
-          <a:xfrm>
-            <a:off x="1296000" y="1818000"/>
-            <a:ext cx="2700000" cy="413999"/>
-          </a:xfrm>
-          <a:prstGeom prst="rect">
-            <a:avLst/>
-          </a:prstGeom>
-          <a:solidFill>
-            <a:srgbClr val="156E9E"/>
-          </a:solidFill>
-          <a:ln>
-            <a:noFill/>
-          </a:ln>
-          <a:effectLst/>
-        </p:spPr>
-        <p:style>
-          <a:lnRef idx="1">
-            <a:schemeClr val="accent1"/>
-          </a:lnRef>
-          <a:fillRef idx="3">
-            <a:schemeClr val="accent1"/>
-          </a:fillRef>
-          <a:effectRef idx="2">
-            <a:schemeClr val="accent1"/>
-          </a:effectRef>
-          <a:fontRef idx="minor">
-            <a:schemeClr val="lt1"/>
-          </a:fontRef>
-        </p:style>
-        <p:txBody>
-          <a:bodyPr rtlCol="0" anchor="ctr" wrap="square" lIns="36000" rIns="36000" tIns="18000" bIns="18000"/>
-          <a:lstStyle/>
-          <a:p>
-            <a:pPr algn="ctr"/>
-            <a:r>
-              <a:rPr sz="1050" b="1">
-                <a:solidFill>
-                  <a:srgbClr val="FFFFFF"/>
-                </a:solidFill>
-                <a:latin typeface="微软雅黑"/>
-              </a:rPr>
-              <a:t>北京燕京中发生物技术有限公司（发行人）</a:t>
-            </a:r>
-          </a:p>
-        </p:txBody>
-      </p:sp>
-      <p:cxnSp>
-        <p:nvCxnSpPr>
-          <p:cNvPr id="18" name="Connector 17"/>
-          <p:cNvCxnSpPr/>
-          <p:nvPr/>
-        </p:nvCxnSpPr>
-        <p:spPr>
-          <a:xfrm>
-            <a:off x="2646000" y="2232000"/>
-            <a:ext cx="0" cy="486000"/>
-          </a:xfrm>
-          <a:prstGeom prst="line">
-            <a:avLst/>
-          </a:prstGeom>
-          <a:ln w="15875">
-            <a:solidFill>
-              <a:srgbClr val="595959"/>
-            </a:solidFill>
-            <a:tailEnd type="triangle" w="med" len="med"/>
-          </a:ln>
-        </p:spPr>
-        <p:style>
-          <a:lnRef idx="2">
-            <a:schemeClr val="accent1"/>
-          </a:lnRef>
-          <a:fillRef idx="0">
-            <a:schemeClr val="accent1"/>
-          </a:fillRef>
-          <a:effectRef idx="1">
-            <a:schemeClr val="accent1"/>
-          </a:effectRef>
-          <a:fontRef idx="minor">
-            <a:schemeClr val="tx1"/>
-          </a:fontRef>
-        </p:style>
-      </p:cxnSp>
-      <p:sp>
-        <p:nvSpPr>
-          <p:cNvPr id="19" name="TextBox 18"/>
-          <p:cNvSpPr txBox="1"/>
-          <p:nvPr/>
-        </p:nvSpPr>
-        <p:spPr>
-          <a:xfrm>
-            <a:off x="2700000" y="2358000"/>
-            <a:ext cx="720000" cy="180000"/>
-          </a:xfrm>
-          <a:prstGeom prst="rect">
-            <a:avLst/>
-          </a:prstGeom>
-          <a:noFill/>
-        </p:spPr>
-        <p:txBody>
-          <a:bodyPr wrap="square" lIns="18000" rIns="18000" tIns="0" bIns="0">
-            <a:spAutoFit/>
-          </a:bodyPr>
-          <a:lstStyle/>
-          <a:p>
-            <a:pPr algn="l"/>
-            <a:r>
-              <a:rPr sz="900" b="1">
-                <a:solidFill>
-                  <a:srgbClr val="333333"/>
-                </a:solidFill>
-                <a:latin typeface="微软雅黑"/>
-              </a:rPr>
-              <a:t>33%</a:t>
-            </a:r>
-          </a:p>
-        </p:txBody>
-      </p:sp>
-      <p:sp>
-        <p:nvSpPr>
-          <p:cNvPr id="20" name="Rectangle 19"/>
-          <p:cNvSpPr/>
-          <p:nvPr/>
-        </p:nvSpPr>
-        <p:spPr>
-          <a:xfrm>
-            <a:off x="1548000" y="2718000"/>
-            <a:ext cx="2196000" cy="413999"/>
-          </a:xfrm>
-          <a:prstGeom prst="rect">
-            <a:avLst/>
-          </a:prstGeom>
-          <a:solidFill>
-            <a:srgbClr val="1F9BDE"/>
-          </a:solidFill>
-          <a:ln>
-            <a:noFill/>
-          </a:ln>
-          <a:effectLst/>
-        </p:spPr>
-        <p:style>
-          <a:lnRef idx="1">
-            <a:schemeClr val="accent1"/>
-          </a:lnRef>
-          <a:fillRef idx="3">
-            <a:schemeClr val="accent1"/>
-          </a:fillRef>
-          <a:effectRef idx="2">
-            <a:schemeClr val="accent1"/>
-          </a:effectRef>
-          <a:fontRef idx="minor">
-            <a:schemeClr val="lt1"/>
-          </a:fontRef>
-        </p:style>
-        <p:txBody>
-          <a:bodyPr rtlCol="0" anchor="ctr" wrap="square" lIns="36000" rIns="36000" tIns="18000" bIns="18000"/>
-          <a:lstStyle/>
-          <a:p>
-            <a:pPr algn="ctr"/>
-            <a:r>
-              <a:rPr sz="1000" b="1">
-                <a:solidFill>
-                  <a:srgbClr val="FFFFFF"/>
-                </a:solidFill>
-                <a:latin typeface="微软雅黑"/>
-              </a:rPr>
-              <a:t>燕京中发生物技术</a:t>
-            </a:r>
-          </a:p>
-          <a:p>
-            <a:pPr algn="ctr"/>
-            <a:r>
-              <a:rPr sz="1000" b="1">
-                <a:solidFill>
-                  <a:srgbClr val="FFFFFF"/>
-                </a:solidFill>
-                <a:latin typeface="微软雅黑"/>
-              </a:rPr>
-              <a:t>（邢台）有限公司</a:t>
-            </a:r>
-          </a:p>
-        </p:txBody>
-      </p:sp>
-      <p:cxnSp>
-        <p:nvCxnSpPr>
-          <p:cNvPr id="21" name="Connector 20"/>
-          <p:cNvCxnSpPr/>
-          <p:nvPr/>
-        </p:nvCxnSpPr>
-        <p:spPr>
-          <a:xfrm>
-            <a:off x="576000" y="1350000"/>
-            <a:ext cx="0" cy="1576800"/>
+            <a:off x="2646000" y="1440000"/>
+            <a:ext cx="0" cy="198000"/>
           </a:xfrm>
           <a:prstGeom prst="line">
             <a:avLst/>
@@ -3918,14 +3553,379 @@
       </p:cxnSp>
       <p:cxnSp>
         <p:nvCxnSpPr>
+          <p:cNvPr id="13" name="Connector 12"/>
+          <p:cNvCxnSpPr/>
+          <p:nvPr/>
+        </p:nvCxnSpPr>
+        <p:spPr>
+          <a:xfrm>
+            <a:off x="4248000" y="1440000"/>
+            <a:ext cx="0" cy="198000"/>
+          </a:xfrm>
+          <a:prstGeom prst="line">
+            <a:avLst/>
+          </a:prstGeom>
+          <a:ln w="15875">
+            <a:solidFill>
+              <a:srgbClr val="595959"/>
+            </a:solidFill>
+          </a:ln>
+        </p:spPr>
+        <p:style>
+          <a:lnRef idx="2">
+            <a:schemeClr val="accent1"/>
+          </a:lnRef>
+          <a:fillRef idx="0">
+            <a:schemeClr val="accent1"/>
+          </a:fillRef>
+          <a:effectRef idx="1">
+            <a:schemeClr val="accent1"/>
+          </a:effectRef>
+          <a:fontRef idx="minor">
+            <a:schemeClr val="tx1"/>
+          </a:fontRef>
+        </p:style>
+      </p:cxnSp>
+      <p:sp>
+        <p:nvSpPr>
+          <p:cNvPr id="14" name="TextBox 13"/>
+          <p:cNvSpPr txBox="1"/>
+          <p:nvPr/>
+        </p:nvSpPr>
+        <p:spPr>
+          <a:xfrm>
+            <a:off x="1134000" y="1447199"/>
+            <a:ext cx="720000" cy="180000"/>
+          </a:xfrm>
+          <a:prstGeom prst="rect">
+            <a:avLst/>
+          </a:prstGeom>
+          <a:noFill/>
+        </p:spPr>
+        <p:txBody>
+          <a:bodyPr wrap="square" lIns="18000" rIns="18000" tIns="0" bIns="0">
+            <a:spAutoFit/>
+          </a:bodyPr>
+          <a:lstStyle/>
+          <a:p>
+            <a:pPr algn="l"/>
+            <a:r>
+              <a:rPr sz="900" b="1">
+                <a:solidFill>
+                  <a:srgbClr val="333333"/>
+                </a:solidFill>
+                <a:latin typeface="微软雅黑"/>
+              </a:rPr>
+              <a:t>80%</a:t>
+            </a:r>
+          </a:p>
+        </p:txBody>
+      </p:sp>
+      <p:sp>
+        <p:nvSpPr>
+          <p:cNvPr id="15" name="TextBox 14"/>
+          <p:cNvSpPr txBox="1"/>
+          <p:nvPr/>
+        </p:nvSpPr>
+        <p:spPr>
+          <a:xfrm>
+            <a:off x="2700000" y="1447199"/>
+            <a:ext cx="792000" cy="180000"/>
+          </a:xfrm>
+          <a:prstGeom prst="rect">
+            <a:avLst/>
+          </a:prstGeom>
+          <a:noFill/>
+        </p:spPr>
+        <p:txBody>
+          <a:bodyPr wrap="square" lIns="18000" rIns="18000" tIns="0" bIns="0">
+            <a:spAutoFit/>
+          </a:bodyPr>
+          <a:lstStyle/>
+          <a:p>
+            <a:pPr algn="l"/>
+            <a:r>
+              <a:rPr sz="900" b="1">
+                <a:solidFill>
+                  <a:srgbClr val="333333"/>
+                </a:solidFill>
+                <a:latin typeface="微软雅黑"/>
+              </a:rPr>
+              <a:t>17.5%</a:t>
+            </a:r>
+          </a:p>
+        </p:txBody>
+      </p:sp>
+      <p:sp>
+        <p:nvSpPr>
+          <p:cNvPr id="16" name="TextBox 15"/>
+          <p:cNvSpPr txBox="1"/>
+          <p:nvPr/>
+        </p:nvSpPr>
+        <p:spPr>
+          <a:xfrm>
+            <a:off x="4302000" y="1447199"/>
+            <a:ext cx="720000" cy="180000"/>
+          </a:xfrm>
+          <a:prstGeom prst="rect">
+            <a:avLst/>
+          </a:prstGeom>
+          <a:noFill/>
+        </p:spPr>
+        <p:txBody>
+          <a:bodyPr wrap="square" lIns="18000" rIns="18000" tIns="0" bIns="0">
+            <a:spAutoFit/>
+          </a:bodyPr>
+          <a:lstStyle/>
+          <a:p>
+            <a:pPr algn="l"/>
+            <a:r>
+              <a:rPr sz="900" b="1">
+                <a:solidFill>
+                  <a:srgbClr val="333333"/>
+                </a:solidFill>
+                <a:latin typeface="微软雅黑"/>
+              </a:rPr>
+              <a:t>2.5%</a:t>
+            </a:r>
+          </a:p>
+        </p:txBody>
+      </p:sp>
+      <p:cxnSp>
+        <p:nvCxnSpPr>
+          <p:cNvPr id="17" name="Connector 16"/>
+          <p:cNvCxnSpPr/>
+          <p:nvPr/>
+        </p:nvCxnSpPr>
+        <p:spPr>
+          <a:xfrm>
+            <a:off x="2646000" y="1638000"/>
+            <a:ext cx="0" cy="180000"/>
+          </a:xfrm>
+          <a:prstGeom prst="line">
+            <a:avLst/>
+          </a:prstGeom>
+          <a:ln w="15875">
+            <a:solidFill>
+              <a:srgbClr val="595959"/>
+            </a:solidFill>
+            <a:tailEnd type="triangle" w="med" len="med"/>
+          </a:ln>
+        </p:spPr>
+        <p:style>
+          <a:lnRef idx="2">
+            <a:schemeClr val="accent1"/>
+          </a:lnRef>
+          <a:fillRef idx="0">
+            <a:schemeClr val="accent1"/>
+          </a:fillRef>
+          <a:effectRef idx="1">
+            <a:schemeClr val="accent1"/>
+          </a:effectRef>
+          <a:fontRef idx="minor">
+            <a:schemeClr val="tx1"/>
+          </a:fontRef>
+        </p:style>
+      </p:cxnSp>
+      <p:sp>
+        <p:nvSpPr>
+          <p:cNvPr id="18" name="Rectangle 17"/>
+          <p:cNvSpPr/>
+          <p:nvPr/>
+        </p:nvSpPr>
+        <p:spPr>
+          <a:xfrm>
+            <a:off x="1296000" y="1818000"/>
+            <a:ext cx="2700000" cy="413999"/>
+          </a:xfrm>
+          <a:prstGeom prst="rect">
+            <a:avLst/>
+          </a:prstGeom>
+          <a:solidFill>
+            <a:srgbClr val="156E9E"/>
+          </a:solidFill>
+          <a:ln>
+            <a:noFill/>
+          </a:ln>
+          <a:effectLst/>
+        </p:spPr>
+        <p:style>
+          <a:lnRef idx="1">
+            <a:schemeClr val="accent1"/>
+          </a:lnRef>
+          <a:fillRef idx="3">
+            <a:schemeClr val="accent1"/>
+          </a:fillRef>
+          <a:effectRef idx="2">
+            <a:schemeClr val="accent1"/>
+          </a:effectRef>
+          <a:fontRef idx="minor">
+            <a:schemeClr val="lt1"/>
+          </a:fontRef>
+        </p:style>
+        <p:txBody>
+          <a:bodyPr rtlCol="0" anchor="ctr" wrap="square" lIns="36000" rIns="36000" tIns="18000" bIns="18000"/>
+          <a:lstStyle/>
+          <a:p>
+            <a:pPr algn="ctr"/>
+            <a:r>
+              <a:rPr sz="1050" b="1">
+                <a:solidFill>
+                  <a:srgbClr val="FFFFFF"/>
+                </a:solidFill>
+                <a:latin typeface="微软雅黑"/>
+              </a:rPr>
+              <a:t>北京燕京中发生物技术有限公司（发行人）</a:t>
+            </a:r>
+          </a:p>
+        </p:txBody>
+      </p:sp>
+      <p:cxnSp>
+        <p:nvCxnSpPr>
+          <p:cNvPr id="19" name="Connector 18"/>
+          <p:cNvCxnSpPr/>
+          <p:nvPr/>
+        </p:nvCxnSpPr>
+        <p:spPr>
+          <a:xfrm>
+            <a:off x="2646000" y="2232000"/>
+            <a:ext cx="0" cy="486000"/>
+          </a:xfrm>
+          <a:prstGeom prst="line">
+            <a:avLst/>
+          </a:prstGeom>
+          <a:ln w="15875">
+            <a:solidFill>
+              <a:srgbClr val="595959"/>
+            </a:solidFill>
+            <a:tailEnd type="triangle" w="med" len="med"/>
+          </a:ln>
+        </p:spPr>
+        <p:style>
+          <a:lnRef idx="2">
+            <a:schemeClr val="accent1"/>
+          </a:lnRef>
+          <a:fillRef idx="0">
+            <a:schemeClr val="accent1"/>
+          </a:fillRef>
+          <a:effectRef idx="1">
+            <a:schemeClr val="accent1"/>
+          </a:effectRef>
+          <a:fontRef idx="minor">
+            <a:schemeClr val="tx1"/>
+          </a:fontRef>
+        </p:style>
+      </p:cxnSp>
+      <p:sp>
+        <p:nvSpPr>
+          <p:cNvPr id="20" name="TextBox 19"/>
+          <p:cNvSpPr txBox="1"/>
+          <p:nvPr/>
+        </p:nvSpPr>
+        <p:spPr>
+          <a:xfrm>
+            <a:off x="2700000" y="2358000"/>
+            <a:ext cx="720000" cy="180000"/>
+          </a:xfrm>
+          <a:prstGeom prst="rect">
+            <a:avLst/>
+          </a:prstGeom>
+          <a:noFill/>
+        </p:spPr>
+        <p:txBody>
+          <a:bodyPr wrap="square" lIns="18000" rIns="18000" tIns="0" bIns="0">
+            <a:spAutoFit/>
+          </a:bodyPr>
+          <a:lstStyle/>
+          <a:p>
+            <a:pPr algn="l"/>
+            <a:r>
+              <a:rPr sz="900" b="1">
+                <a:solidFill>
+                  <a:srgbClr val="333333"/>
+                </a:solidFill>
+                <a:latin typeface="微软雅黑"/>
+              </a:rPr>
+              <a:t>33%</a:t>
+            </a:r>
+          </a:p>
+        </p:txBody>
+      </p:sp>
+      <p:sp>
+        <p:nvSpPr>
+          <p:cNvPr id="21" name="Rectangle 20"/>
+          <p:cNvSpPr/>
+          <p:nvPr/>
+        </p:nvSpPr>
+        <p:spPr>
+          <a:xfrm>
+            <a:off x="1548000" y="2718000"/>
+            <a:ext cx="2196000" cy="413999"/>
+          </a:xfrm>
+          <a:prstGeom prst="rect">
+            <a:avLst/>
+          </a:prstGeom>
+          <a:solidFill>
+            <a:srgbClr val="1F9BDE"/>
+          </a:solidFill>
+          <a:ln>
+            <a:noFill/>
+          </a:ln>
+          <a:effectLst/>
+        </p:spPr>
+        <p:style>
+          <a:lnRef idx="1">
+            <a:schemeClr val="accent1"/>
+          </a:lnRef>
+          <a:fillRef idx="3">
+            <a:schemeClr val="accent1"/>
+          </a:fillRef>
+          <a:effectRef idx="2">
+            <a:schemeClr val="accent1"/>
+          </a:effectRef>
+          <a:fontRef idx="minor">
+            <a:schemeClr val="lt1"/>
+          </a:fontRef>
+        </p:style>
+        <p:txBody>
+          <a:bodyPr rtlCol="0" anchor="ctr" wrap="square" lIns="36000" rIns="36000" tIns="18000" bIns="18000"/>
+          <a:lstStyle/>
+          <a:p>
+            <a:pPr algn="ctr"/>
+            <a:r>
+              <a:rPr sz="1000" b="1">
+                <a:solidFill>
+                  <a:srgbClr val="FFFFFF"/>
+                </a:solidFill>
+                <a:latin typeface="微软雅黑"/>
+              </a:rPr>
+              <a:t>燕京中发生物技术</a:t>
+            </a:r>
+          </a:p>
+          <a:p>
+            <a:pPr algn="ctr"/>
+            <a:r>
+              <a:rPr sz="1000" b="1">
+                <a:solidFill>
+                  <a:srgbClr val="FFFFFF"/>
+                </a:solidFill>
+                <a:latin typeface="微软雅黑"/>
+              </a:rPr>
+              <a:t>（邢台）有限公司</a:t>
+            </a:r>
+          </a:p>
+        </p:txBody>
+      </p:sp>
+      <p:cxnSp>
+        <p:nvCxnSpPr>
           <p:cNvPr id="22" name="Connector 21"/>
           <p:cNvCxnSpPr/>
           <p:nvPr/>
         </p:nvCxnSpPr>
         <p:spPr>
           <a:xfrm>
-            <a:off x="576000" y="2926800"/>
-            <a:ext cx="972000" cy="0"/>
+            <a:off x="576000" y="1440000"/>
+            <a:ext cx="0" cy="1486800"/>
           </a:xfrm>
           <a:prstGeom prst="line">
             <a:avLst/>
@@ -3986,51 +3986,16 @@
           </a:fontRef>
         </p:style>
       </p:cxnSp>
-      <p:sp>
-        <p:nvSpPr>
-          <p:cNvPr id="24" name="TextBox 23"/>
-          <p:cNvSpPr txBox="1"/>
-          <p:nvPr/>
-        </p:nvSpPr>
-        <p:spPr>
-          <a:xfrm>
-            <a:off x="630000" y="2743200"/>
-            <a:ext cx="720000" cy="180000"/>
-          </a:xfrm>
-          <a:prstGeom prst="rect">
-            <a:avLst/>
-          </a:prstGeom>
-          <a:noFill/>
-        </p:spPr>
-        <p:txBody>
-          <a:bodyPr wrap="square" lIns="18000" rIns="18000" tIns="0" bIns="0">
-            <a:spAutoFit/>
-          </a:bodyPr>
-          <a:lstStyle/>
-          <a:p>
-            <a:pPr algn="l"/>
-            <a:r>
-              <a:rPr sz="900" b="1">
-                <a:solidFill>
-                  <a:srgbClr val="333333"/>
-                </a:solidFill>
-                <a:latin typeface="微软雅黑"/>
-              </a:rPr>
-              <a:t>67%</a:t>
-            </a:r>
-          </a:p>
-        </p:txBody>
-      </p:sp>
       <p:cxnSp>
         <p:nvCxnSpPr>
-          <p:cNvPr id="25" name="Connector 24"/>
+          <p:cNvPr id="24" name="Connector 23"/>
           <p:cNvCxnSpPr/>
           <p:nvPr/>
         </p:nvCxnSpPr>
         <p:spPr>
           <a:xfrm>
-            <a:off x="936000" y="1350000"/>
-            <a:ext cx="0" cy="2466000"/>
+            <a:off x="576000" y="2926800"/>
+            <a:ext cx="972000" cy="0"/>
           </a:xfrm>
           <a:prstGeom prst="line">
             <a:avLst/>
@@ -4056,6 +4021,41 @@
           </a:fontRef>
         </p:style>
       </p:cxnSp>
+      <p:sp>
+        <p:nvSpPr>
+          <p:cNvPr id="25" name="TextBox 24"/>
+          <p:cNvSpPr txBox="1"/>
+          <p:nvPr/>
+        </p:nvSpPr>
+        <p:spPr>
+          <a:xfrm>
+            <a:off x="630000" y="2743200"/>
+            <a:ext cx="720000" cy="180000"/>
+          </a:xfrm>
+          <a:prstGeom prst="rect">
+            <a:avLst/>
+          </a:prstGeom>
+          <a:noFill/>
+        </p:spPr>
+        <p:txBody>
+          <a:bodyPr wrap="square" lIns="18000" rIns="18000" tIns="0" bIns="0">
+            <a:spAutoFit/>
+          </a:bodyPr>
+          <a:lstStyle/>
+          <a:p>
+            <a:pPr algn="l"/>
+            <a:r>
+              <a:rPr sz="900" b="1">
+                <a:solidFill>
+                  <a:srgbClr val="333333"/>
+                </a:solidFill>
+                <a:latin typeface="微软雅黑"/>
+              </a:rPr>
+              <a:t>67%</a:t>
+            </a:r>
+          </a:p>
+        </p:txBody>
+      </p:sp>
       <p:cxnSp>
         <p:nvCxnSpPr>
           <p:cNvPr id="26" name="Connector 25"/>
@@ -4064,8 +4064,8 @@
         </p:nvCxnSpPr>
         <p:spPr>
           <a:xfrm>
-            <a:off x="936000" y="3816000"/>
-            <a:ext cx="612000" cy="0"/>
+            <a:off x="936000" y="1440000"/>
+            <a:ext cx="0" cy="2376000"/>
           </a:xfrm>
           <a:prstGeom prst="line">
             <a:avLst/>
@@ -4126,9 +4126,44 @@
           </a:fontRef>
         </p:style>
       </p:cxnSp>
-      <p:sp>
-        <p:nvSpPr>
-          <p:cNvPr id="28" name="TextBox 27"/>
+      <p:cxnSp>
+        <p:nvCxnSpPr>
+          <p:cNvPr id="28" name="Connector 27"/>
+          <p:cNvCxnSpPr/>
+          <p:nvPr/>
+        </p:nvCxnSpPr>
+        <p:spPr>
+          <a:xfrm>
+            <a:off x="936000" y="3816000"/>
+            <a:ext cx="612000" cy="0"/>
+          </a:xfrm>
+          <a:prstGeom prst="line">
+            <a:avLst/>
+          </a:prstGeom>
+          <a:ln w="15875">
+            <a:solidFill>
+              <a:srgbClr val="595959"/>
+            </a:solidFill>
+          </a:ln>
+        </p:spPr>
+        <p:style>
+          <a:lnRef idx="2">
+            <a:schemeClr val="accent1"/>
+          </a:lnRef>
+          <a:fillRef idx="0">
+            <a:schemeClr val="accent1"/>
+          </a:fillRef>
+          <a:effectRef idx="1">
+            <a:schemeClr val="accent1"/>
+          </a:effectRef>
+          <a:fontRef idx="minor">
+            <a:schemeClr val="tx1"/>
+          </a:fontRef>
+        </p:style>
+      </p:cxnSp>
+      <p:sp>
+        <p:nvSpPr>
+          <p:cNvPr id="29" name="TextBox 28"/>
           <p:cNvSpPr txBox="1"/>
           <p:nvPr/>
         </p:nvSpPr>
@@ -4163,7 +4198,7 @@
       </p:sp>
       <p:sp>
         <p:nvSpPr>
-          <p:cNvPr id="29" name="Rectangle 28"/>
+          <p:cNvPr id="30" name="Rectangle 29"/>
           <p:cNvSpPr/>
           <p:nvPr/>
         </p:nvSpPr>
@@ -4228,7 +4263,7 @@
       </p:sp>
       <p:sp>
         <p:nvSpPr>
-          <p:cNvPr id="30" name="TextBox 29"/>
+          <p:cNvPr id="31" name="TextBox 30"/>
           <p:cNvSpPr txBox="1"/>
           <p:nvPr/>
         </p:nvSpPr>
@@ -4287,7 +4322,7 @@
       </p:sp>
       <p:sp>
         <p:nvSpPr>
-          <p:cNvPr id="31" name="TextBox 30"/>
+          <p:cNvPr id="32" name="TextBox 31"/>
           <p:cNvSpPr txBox="1"/>
           <p:nvPr/>
         </p:nvSpPr>
@@ -4346,7 +4381,7 @@
       </p:sp>
       <p:sp>
         <p:nvSpPr>
-          <p:cNvPr id="32" name="Right Arrow 31"/>
+          <p:cNvPr id="33" name="Right Arrow 32"/>
           <p:cNvSpPr/>
           <p:nvPr/>
         </p:nvSpPr>
@@ -4388,7 +4423,7 @@
       </p:sp>
       <p:sp>
         <p:nvSpPr>
-          <p:cNvPr id="33" name="TextBox 32"/>
+          <p:cNvPr id="34" name="TextBox 33"/>
           <p:cNvSpPr txBox="1"/>
           <p:nvPr/>
         </p:nvSpPr>
@@ -4471,13 +4506,13 @@
       </p:sp>
       <p:sp>
         <p:nvSpPr>
-          <p:cNvPr id="34" name="Rectangle 33"/>
+          <p:cNvPr id="35" name="Rectangle 34"/>
           <p:cNvSpPr/>
           <p:nvPr/>
         </p:nvSpPr>
         <p:spPr>
           <a:xfrm>
-            <a:off x="6983999" y="972000"/>
+            <a:off x="6983999" y="1062000"/>
             <a:ext cx="1440000" cy="378000"/>
           </a:xfrm>
           <a:prstGeom prst="rect">
@@ -4536,13 +4571,13 @@
       </p:sp>
       <p:sp>
         <p:nvSpPr>
-          <p:cNvPr id="35" name="Rectangle 34"/>
+          <p:cNvPr id="36" name="Rectangle 35"/>
           <p:cNvSpPr/>
           <p:nvPr/>
         </p:nvSpPr>
         <p:spPr>
           <a:xfrm>
-            <a:off x="8640000" y="972000"/>
+            <a:off x="8640000" y="1062000"/>
             <a:ext cx="1260000" cy="378000"/>
           </a:xfrm>
           <a:prstGeom prst="rect">
@@ -4589,13 +4624,13 @@
       </p:sp>
       <p:sp>
         <p:nvSpPr>
-          <p:cNvPr id="36" name="Rectangle 35"/>
+          <p:cNvPr id="37" name="Rectangle 36"/>
           <p:cNvSpPr/>
           <p:nvPr/>
         </p:nvSpPr>
         <p:spPr>
           <a:xfrm>
-            <a:off x="10116000" y="972000"/>
+            <a:off x="10116000" y="1062000"/>
             <a:ext cx="1512000" cy="378000"/>
           </a:xfrm>
           <a:prstGeom prst="rect">
@@ -4654,49 +4689,14 @@
       </p:sp>
       <p:cxnSp>
         <p:nvCxnSpPr>
-          <p:cNvPr id="37" name="Connector 36"/>
-          <p:cNvCxnSpPr/>
-          <p:nvPr/>
-        </p:nvCxnSpPr>
-        <p:spPr>
-          <a:xfrm>
-            <a:off x="7703999" y="1565999"/>
-            <a:ext cx="3168001" cy="0"/>
-          </a:xfrm>
-          <a:prstGeom prst="line">
-            <a:avLst/>
-          </a:prstGeom>
-          <a:ln w="15875">
-            <a:solidFill>
-              <a:srgbClr val="595959"/>
-            </a:solidFill>
-          </a:ln>
-        </p:spPr>
-        <p:style>
-          <a:lnRef idx="2">
-            <a:schemeClr val="accent1"/>
-          </a:lnRef>
-          <a:fillRef idx="0">
-            <a:schemeClr val="accent1"/>
-          </a:fillRef>
-          <a:effectRef idx="1">
-            <a:schemeClr val="accent1"/>
-          </a:effectRef>
-          <a:fontRef idx="minor">
-            <a:schemeClr val="tx1"/>
-          </a:fontRef>
-        </p:style>
-      </p:cxnSp>
-      <p:cxnSp>
-        <p:nvCxnSpPr>
           <p:cNvPr id="38" name="Connector 37"/>
           <p:cNvCxnSpPr/>
           <p:nvPr/>
         </p:nvCxnSpPr>
         <p:spPr>
           <a:xfrm>
-            <a:off x="7703999" y="1350000"/>
-            <a:ext cx="0" cy="215999"/>
+            <a:off x="7703999" y="1638000"/>
+            <a:ext cx="3168001" cy="0"/>
           </a:xfrm>
           <a:prstGeom prst="line">
             <a:avLst/>
@@ -4730,8 +4730,8 @@
         </p:nvCxnSpPr>
         <p:spPr>
           <a:xfrm>
-            <a:off x="9270000" y="1350000"/>
-            <a:ext cx="0" cy="215999"/>
+            <a:off x="7703999" y="1440000"/>
+            <a:ext cx="0" cy="198000"/>
           </a:xfrm>
           <a:prstGeom prst="line">
             <a:avLst/>
@@ -4765,237 +4765,8 @@
         </p:nvCxnSpPr>
         <p:spPr>
           <a:xfrm>
-            <a:off x="10872000" y="1350000"/>
-            <a:ext cx="0" cy="215999"/>
-          </a:xfrm>
-          <a:prstGeom prst="line">
-            <a:avLst/>
-          </a:prstGeom>
-          <a:ln w="15875">
-            <a:solidFill>
-              <a:srgbClr val="595959"/>
-            </a:solidFill>
-          </a:ln>
-        </p:spPr>
-        <p:style>
-          <a:lnRef idx="2">
-            <a:schemeClr val="accent1"/>
-          </a:lnRef>
-          <a:fillRef idx="0">
-            <a:schemeClr val="accent1"/>
-          </a:fillRef>
-          <a:effectRef idx="1">
-            <a:schemeClr val="accent1"/>
-          </a:effectRef>
-          <a:fontRef idx="minor">
-            <a:schemeClr val="tx1"/>
-          </a:fontRef>
-        </p:style>
-      </p:cxnSp>
-      <p:sp>
-        <p:nvSpPr>
-          <p:cNvPr id="41" name="TextBox 40"/>
-          <p:cNvSpPr txBox="1"/>
-          <p:nvPr/>
-        </p:nvSpPr>
-        <p:spPr>
-          <a:xfrm>
-            <a:off x="7758000" y="1368000"/>
-            <a:ext cx="864000" cy="180000"/>
-          </a:xfrm>
-          <a:prstGeom prst="rect">
-            <a:avLst/>
-          </a:prstGeom>
-          <a:noFill/>
-        </p:spPr>
-        <p:txBody>
-          <a:bodyPr wrap="square" lIns="18000" rIns="18000" tIns="0" bIns="0">
-            <a:spAutoFit/>
-          </a:bodyPr>
-          <a:lstStyle/>
-          <a:p>
-            <a:pPr algn="l"/>
-            <a:r>
-              <a:rPr sz="850" b="1">
-                <a:solidFill>
-                  <a:srgbClr val="C03A2B"/>
-                </a:solidFill>
-                <a:latin typeface="微软雅黑"/>
-              </a:rPr>
-              <a:t>↑ 上升</a:t>
-            </a:r>
-          </a:p>
-        </p:txBody>
-      </p:sp>
-      <p:sp>
-        <p:nvSpPr>
-          <p:cNvPr id="42" name="TextBox 41"/>
-          <p:cNvSpPr txBox="1"/>
-          <p:nvPr/>
-        </p:nvSpPr>
-        <p:spPr>
-          <a:xfrm>
-            <a:off x="9324000" y="1368000"/>
-            <a:ext cx="864000" cy="180000"/>
-          </a:xfrm>
-          <a:prstGeom prst="rect">
-            <a:avLst/>
-          </a:prstGeom>
-          <a:noFill/>
-        </p:spPr>
-        <p:txBody>
-          <a:bodyPr wrap="square" lIns="18000" rIns="18000" tIns="0" bIns="0">
-            <a:spAutoFit/>
-          </a:bodyPr>
-          <a:lstStyle/>
-          <a:p>
-            <a:pPr algn="l"/>
-            <a:r>
-              <a:rPr sz="850" b="1">
-                <a:solidFill>
-                  <a:srgbClr val="888888"/>
-                </a:solidFill>
-                <a:latin typeface="微软雅黑"/>
-              </a:rPr>
-              <a:t>↓ 稀释</a:t>
-            </a:r>
-          </a:p>
-        </p:txBody>
-      </p:sp>
-      <p:sp>
-        <p:nvSpPr>
-          <p:cNvPr id="43" name="TextBox 42"/>
-          <p:cNvSpPr txBox="1"/>
-          <p:nvPr/>
-        </p:nvSpPr>
-        <p:spPr>
-          <a:xfrm>
-            <a:off x="10926000" y="1368000"/>
-            <a:ext cx="864000" cy="180000"/>
-          </a:xfrm>
-          <a:prstGeom prst="rect">
-            <a:avLst/>
-          </a:prstGeom>
-          <a:noFill/>
-        </p:spPr>
-        <p:txBody>
-          <a:bodyPr wrap="square" lIns="18000" rIns="18000" tIns="0" bIns="0">
-            <a:spAutoFit/>
-          </a:bodyPr>
-          <a:lstStyle/>
-          <a:p>
-            <a:pPr algn="l"/>
-            <a:r>
-              <a:rPr sz="850" b="1">
-                <a:solidFill>
-                  <a:srgbClr val="888888"/>
-                </a:solidFill>
-                <a:latin typeface="微软雅黑"/>
-              </a:rPr>
-              <a:t>↓ 稀释</a:t>
-            </a:r>
-          </a:p>
-        </p:txBody>
-      </p:sp>
-      <p:cxnSp>
-        <p:nvCxnSpPr>
-          <p:cNvPr id="44" name="Connector 43"/>
-          <p:cNvCxnSpPr/>
-          <p:nvPr/>
-        </p:nvCxnSpPr>
-        <p:spPr>
-          <a:xfrm>
-            <a:off x="9270000" y="1565999"/>
-            <a:ext cx="0" cy="252001"/>
-          </a:xfrm>
-          <a:prstGeom prst="line">
-            <a:avLst/>
-          </a:prstGeom>
-          <a:ln w="15875">
-            <a:solidFill>
-              <a:srgbClr val="595959"/>
-            </a:solidFill>
-            <a:tailEnd type="triangle" w="med" len="med"/>
-          </a:ln>
-        </p:spPr>
-        <p:style>
-          <a:lnRef idx="2">
-            <a:schemeClr val="accent1"/>
-          </a:lnRef>
-          <a:fillRef idx="0">
-            <a:schemeClr val="accent1"/>
-          </a:fillRef>
-          <a:effectRef idx="1">
-            <a:schemeClr val="accent1"/>
-          </a:effectRef>
-          <a:fontRef idx="minor">
-            <a:schemeClr val="tx1"/>
-          </a:fontRef>
-        </p:style>
-      </p:cxnSp>
-      <p:sp>
-        <p:nvSpPr>
-          <p:cNvPr id="45" name="Rectangle 44"/>
-          <p:cNvSpPr/>
-          <p:nvPr/>
-        </p:nvSpPr>
-        <p:spPr>
-          <a:xfrm>
-            <a:off x="7920000" y="1818000"/>
-            <a:ext cx="2700000" cy="413999"/>
-          </a:xfrm>
-          <a:prstGeom prst="rect">
-            <a:avLst/>
-          </a:prstGeom>
-          <a:solidFill>
-            <a:srgbClr val="156E9E"/>
-          </a:solidFill>
-          <a:ln>
-            <a:noFill/>
-          </a:ln>
-          <a:effectLst/>
-        </p:spPr>
-        <p:style>
-          <a:lnRef idx="1">
-            <a:schemeClr val="accent1"/>
-          </a:lnRef>
-          <a:fillRef idx="3">
-            <a:schemeClr val="accent1"/>
-          </a:fillRef>
-          <a:effectRef idx="2">
-            <a:schemeClr val="accent1"/>
-          </a:effectRef>
-          <a:fontRef idx="minor">
-            <a:schemeClr val="lt1"/>
-          </a:fontRef>
-        </p:style>
-        <p:txBody>
-          <a:bodyPr rtlCol="0" anchor="ctr" wrap="square" lIns="36000" rIns="36000" tIns="18000" bIns="18000"/>
-          <a:lstStyle/>
-          <a:p>
-            <a:pPr algn="ctr"/>
-            <a:r>
-              <a:rPr sz="1050" b="1">
-                <a:solidFill>
-                  <a:srgbClr val="FFFFFF"/>
-                </a:solidFill>
-                <a:latin typeface="微软雅黑"/>
-              </a:rPr>
-              <a:t>北京燕京中发生物技术有限公司（发行人）</a:t>
-            </a:r>
-          </a:p>
-        </p:txBody>
-      </p:sp>
-      <p:cxnSp>
-        <p:nvCxnSpPr>
-          <p:cNvPr id="46" name="Connector 45"/>
-          <p:cNvCxnSpPr/>
-          <p:nvPr/>
-        </p:nvCxnSpPr>
-        <p:spPr>
-          <a:xfrm>
-            <a:off x="8063999" y="2538000"/>
-            <a:ext cx="2592001" cy="0"/>
+            <a:off x="9270000" y="1440000"/>
+            <a:ext cx="0" cy="198000"/>
           </a:xfrm>
           <a:prstGeom prst="line">
             <a:avLst/>
@@ -5023,14 +4794,243 @@
       </p:cxnSp>
       <p:cxnSp>
         <p:nvCxnSpPr>
+          <p:cNvPr id="41" name="Connector 40"/>
+          <p:cNvCxnSpPr/>
+          <p:nvPr/>
+        </p:nvCxnSpPr>
+        <p:spPr>
+          <a:xfrm>
+            <a:off x="10872000" y="1440000"/>
+            <a:ext cx="0" cy="198000"/>
+          </a:xfrm>
+          <a:prstGeom prst="line">
+            <a:avLst/>
+          </a:prstGeom>
+          <a:ln w="15875">
+            <a:solidFill>
+              <a:srgbClr val="595959"/>
+            </a:solidFill>
+          </a:ln>
+        </p:spPr>
+        <p:style>
+          <a:lnRef idx="2">
+            <a:schemeClr val="accent1"/>
+          </a:lnRef>
+          <a:fillRef idx="0">
+            <a:schemeClr val="accent1"/>
+          </a:fillRef>
+          <a:effectRef idx="1">
+            <a:schemeClr val="accent1"/>
+          </a:effectRef>
+          <a:fontRef idx="minor">
+            <a:schemeClr val="tx1"/>
+          </a:fontRef>
+        </p:style>
+      </p:cxnSp>
+      <p:sp>
+        <p:nvSpPr>
+          <p:cNvPr id="42" name="TextBox 41"/>
+          <p:cNvSpPr txBox="1"/>
+          <p:nvPr/>
+        </p:nvSpPr>
+        <p:spPr>
+          <a:xfrm>
+            <a:off x="7758000" y="1447199"/>
+            <a:ext cx="864000" cy="180000"/>
+          </a:xfrm>
+          <a:prstGeom prst="rect">
+            <a:avLst/>
+          </a:prstGeom>
+          <a:noFill/>
+        </p:spPr>
+        <p:txBody>
+          <a:bodyPr wrap="square" lIns="18000" rIns="18000" tIns="0" bIns="0">
+            <a:spAutoFit/>
+          </a:bodyPr>
+          <a:lstStyle/>
+          <a:p>
+            <a:pPr algn="l"/>
+            <a:r>
+              <a:rPr sz="850" b="1">
+                <a:solidFill>
+                  <a:srgbClr val="C03A2B"/>
+                </a:solidFill>
+                <a:latin typeface="微软雅黑"/>
+              </a:rPr>
+              <a:t>↑ 上升</a:t>
+            </a:r>
+          </a:p>
+        </p:txBody>
+      </p:sp>
+      <p:sp>
+        <p:nvSpPr>
+          <p:cNvPr id="43" name="TextBox 42"/>
+          <p:cNvSpPr txBox="1"/>
+          <p:nvPr/>
+        </p:nvSpPr>
+        <p:spPr>
+          <a:xfrm>
+            <a:off x="9324000" y="1447199"/>
+            <a:ext cx="864000" cy="180000"/>
+          </a:xfrm>
+          <a:prstGeom prst="rect">
+            <a:avLst/>
+          </a:prstGeom>
+          <a:noFill/>
+        </p:spPr>
+        <p:txBody>
+          <a:bodyPr wrap="square" lIns="18000" rIns="18000" tIns="0" bIns="0">
+            <a:spAutoFit/>
+          </a:bodyPr>
+          <a:lstStyle/>
+          <a:p>
+            <a:pPr algn="l"/>
+            <a:r>
+              <a:rPr sz="850" b="1">
+                <a:solidFill>
+                  <a:srgbClr val="888888"/>
+                </a:solidFill>
+                <a:latin typeface="微软雅黑"/>
+              </a:rPr>
+              <a:t>↓ 稀释</a:t>
+            </a:r>
+          </a:p>
+        </p:txBody>
+      </p:sp>
+      <p:sp>
+        <p:nvSpPr>
+          <p:cNvPr id="44" name="TextBox 43"/>
+          <p:cNvSpPr txBox="1"/>
+          <p:nvPr/>
+        </p:nvSpPr>
+        <p:spPr>
+          <a:xfrm>
+            <a:off x="10926000" y="1447199"/>
+            <a:ext cx="864000" cy="180000"/>
+          </a:xfrm>
+          <a:prstGeom prst="rect">
+            <a:avLst/>
+          </a:prstGeom>
+          <a:noFill/>
+        </p:spPr>
+        <p:txBody>
+          <a:bodyPr wrap="square" lIns="18000" rIns="18000" tIns="0" bIns="0">
+            <a:spAutoFit/>
+          </a:bodyPr>
+          <a:lstStyle/>
+          <a:p>
+            <a:pPr algn="l"/>
+            <a:r>
+              <a:rPr sz="850" b="1">
+                <a:solidFill>
+                  <a:srgbClr val="888888"/>
+                </a:solidFill>
+                <a:latin typeface="微软雅黑"/>
+              </a:rPr>
+              <a:t>↓ 稀释</a:t>
+            </a:r>
+          </a:p>
+        </p:txBody>
+      </p:sp>
+      <p:cxnSp>
+        <p:nvCxnSpPr>
+          <p:cNvPr id="45" name="Connector 44"/>
+          <p:cNvCxnSpPr/>
+          <p:nvPr/>
+        </p:nvCxnSpPr>
+        <p:spPr>
+          <a:xfrm>
+            <a:off x="9270000" y="1638000"/>
+            <a:ext cx="0" cy="180000"/>
+          </a:xfrm>
+          <a:prstGeom prst="line">
+            <a:avLst/>
+          </a:prstGeom>
+          <a:ln w="15875">
+            <a:solidFill>
+              <a:srgbClr val="595959"/>
+            </a:solidFill>
+            <a:tailEnd type="triangle" w="med" len="med"/>
+          </a:ln>
+        </p:spPr>
+        <p:style>
+          <a:lnRef idx="2">
+            <a:schemeClr val="accent1"/>
+          </a:lnRef>
+          <a:fillRef idx="0">
+            <a:schemeClr val="accent1"/>
+          </a:fillRef>
+          <a:effectRef idx="1">
+            <a:schemeClr val="accent1"/>
+          </a:effectRef>
+          <a:fontRef idx="minor">
+            <a:schemeClr val="tx1"/>
+          </a:fontRef>
+        </p:style>
+      </p:cxnSp>
+      <p:sp>
+        <p:nvSpPr>
+          <p:cNvPr id="46" name="Rectangle 45"/>
+          <p:cNvSpPr/>
+          <p:nvPr/>
+        </p:nvSpPr>
+        <p:spPr>
+          <a:xfrm>
+            <a:off x="7920000" y="1818000"/>
+            <a:ext cx="2700000" cy="413999"/>
+          </a:xfrm>
+          <a:prstGeom prst="rect">
+            <a:avLst/>
+          </a:prstGeom>
+          <a:solidFill>
+            <a:srgbClr val="156E9E"/>
+          </a:solidFill>
+          <a:ln>
+            <a:noFill/>
+          </a:ln>
+          <a:effectLst/>
+        </p:spPr>
+        <p:style>
+          <a:lnRef idx="1">
+            <a:schemeClr val="accent1"/>
+          </a:lnRef>
+          <a:fillRef idx="3">
+            <a:schemeClr val="accent1"/>
+          </a:fillRef>
+          <a:effectRef idx="2">
+            <a:schemeClr val="accent1"/>
+          </a:effectRef>
+          <a:fontRef idx="minor">
+            <a:schemeClr val="lt1"/>
+          </a:fontRef>
+        </p:style>
+        <p:txBody>
+          <a:bodyPr rtlCol="0" anchor="ctr" wrap="square" lIns="36000" rIns="36000" tIns="18000" bIns="18000"/>
+          <a:lstStyle/>
+          <a:p>
+            <a:pPr algn="ctr"/>
+            <a:r>
+              <a:rPr sz="1050" b="1">
+                <a:solidFill>
+                  <a:srgbClr val="FFFFFF"/>
+                </a:solidFill>
+                <a:latin typeface="微软雅黑"/>
+              </a:rPr>
+              <a:t>北京燕京中发生物技术有限公司（发行人）</a:t>
+            </a:r>
+          </a:p>
+        </p:txBody>
+      </p:sp>
+      <p:cxnSp>
+        <p:nvCxnSpPr>
           <p:cNvPr id="47" name="Connector 46"/>
           <p:cNvCxnSpPr/>
           <p:nvPr/>
         </p:nvCxnSpPr>
         <p:spPr>
           <a:xfrm>
-            <a:off x="9270000" y="2232000"/>
-            <a:ext cx="0" cy="306000"/>
+            <a:off x="8063999" y="2538000"/>
+            <a:ext cx="2592001" cy="0"/>
           </a:xfrm>
           <a:prstGeom prst="line">
             <a:avLst/>
@@ -5064,8 +5064,8 @@
         </p:nvCxnSpPr>
         <p:spPr>
           <a:xfrm>
-            <a:off x="8063999" y="2538000"/>
-            <a:ext cx="0" cy="252000"/>
+            <a:off x="9270000" y="2232000"/>
+            <a:ext cx="0" cy="306000"/>
           </a:xfrm>
           <a:prstGeom prst="line">
             <a:avLst/>
@@ -5074,7 +5074,6 @@
             <a:solidFill>
               <a:srgbClr val="595959"/>
             </a:solidFill>
-            <a:tailEnd type="triangle" w="med" len="med"/>
           </a:ln>
         </p:spPr>
         <p:style>
@@ -5100,7 +5099,7 @@
         </p:nvCxnSpPr>
         <p:spPr>
           <a:xfrm>
-            <a:off x="10656000" y="2538000"/>
+            <a:off x="8063999" y="2538000"/>
             <a:ext cx="0" cy="252000"/>
           </a:xfrm>
           <a:prstGeom prst="line">
@@ -5128,9 +5127,45 @@
           </a:fontRef>
         </p:style>
       </p:cxnSp>
-      <p:sp>
-        <p:nvSpPr>
-          <p:cNvPr id="50" name="TextBox 49"/>
+      <p:cxnSp>
+        <p:nvCxnSpPr>
+          <p:cNvPr id="50" name="Connector 49"/>
+          <p:cNvCxnSpPr/>
+          <p:nvPr/>
+        </p:nvCxnSpPr>
+        <p:spPr>
+          <a:xfrm>
+            <a:off x="10656000" y="2538000"/>
+            <a:ext cx="0" cy="252000"/>
+          </a:xfrm>
+          <a:prstGeom prst="line">
+            <a:avLst/>
+          </a:prstGeom>
+          <a:ln w="15875">
+            <a:solidFill>
+              <a:srgbClr val="595959"/>
+            </a:solidFill>
+            <a:tailEnd type="triangle" w="med" len="med"/>
+          </a:ln>
+        </p:spPr>
+        <p:style>
+          <a:lnRef idx="2">
+            <a:schemeClr val="accent1"/>
+          </a:lnRef>
+          <a:fillRef idx="0">
+            <a:schemeClr val="accent1"/>
+          </a:fillRef>
+          <a:effectRef idx="1">
+            <a:schemeClr val="accent1"/>
+          </a:effectRef>
+          <a:fontRef idx="minor">
+            <a:schemeClr val="tx1"/>
+          </a:fontRef>
+        </p:style>
+      </p:cxnSp>
+      <p:sp>
+        <p:nvSpPr>
+          <p:cNvPr id="51" name="TextBox 50"/>
           <p:cNvSpPr txBox="1"/>
           <p:nvPr/>
         </p:nvSpPr>
@@ -5165,7 +5200,7 @@
       </p:sp>
       <p:sp>
         <p:nvSpPr>
-          <p:cNvPr id="51" name="TextBox 50"/>
+          <p:cNvPr id="52" name="TextBox 51"/>
           <p:cNvSpPr txBox="1"/>
           <p:nvPr/>
         </p:nvSpPr>
@@ -5200,7 +5235,7 @@
       </p:sp>
       <p:sp>
         <p:nvSpPr>
-          <p:cNvPr id="52" name="Rectangle 51"/>
+          <p:cNvPr id="53" name="Rectangle 52"/>
           <p:cNvSpPr/>
           <p:nvPr/>
         </p:nvSpPr>
@@ -5265,7 +5300,7 @@
       </p:sp>
       <p:sp>
         <p:nvSpPr>
-          <p:cNvPr id="53" name="Rectangle 52"/>
+          <p:cNvPr id="54" name="Rectangle 53"/>
           <p:cNvSpPr/>
           <p:nvPr/>
         </p:nvSpPr>
@@ -5330,7 +5365,7 @@
       </p:sp>
       <p:sp>
         <p:nvSpPr>
-          <p:cNvPr id="54" name="Left-Right Arrow 53"/>
+          <p:cNvPr id="55" name="Left-Right Arrow 54"/>
           <p:cNvSpPr/>
           <p:nvPr/>
         </p:nvSpPr>
@@ -5374,7 +5409,7 @@
       </p:sp>
       <p:sp>
         <p:nvSpPr>
-          <p:cNvPr id="55" name="TextBox 54"/>
+          <p:cNvPr id="56" name="TextBox 55"/>
           <p:cNvSpPr txBox="1"/>
           <p:nvPr/>
         </p:nvSpPr>
@@ -5409,7 +5444,7 @@
       </p:sp>
       <p:cxnSp>
         <p:nvCxnSpPr>
-          <p:cNvPr id="56" name="Connector 55"/>
+          <p:cNvPr id="57" name="Connector 56"/>
           <p:cNvCxnSpPr/>
           <p:nvPr/>
         </p:nvCxnSpPr>
@@ -5445,7 +5480,7 @@
       </p:cxnSp>
       <p:sp>
         <p:nvSpPr>
-          <p:cNvPr id="57" name="Rectangle 56"/>
+          <p:cNvPr id="58" name="Rectangle 57"/>
           <p:cNvSpPr/>
           <p:nvPr/>
         </p:nvSpPr>
@@ -5498,7 +5533,7 @@
       </p:sp>
       <p:sp>
         <p:nvSpPr>
-          <p:cNvPr id="58" name="TextBox 57"/>
+          <p:cNvPr id="59" name="TextBox 58"/>
           <p:cNvSpPr txBox="1"/>
           <p:nvPr/>
         </p:nvSpPr>
@@ -5545,7 +5580,7 @@
       </p:sp>
       <p:sp>
         <p:nvSpPr>
-          <p:cNvPr id="59" name="TextBox 58"/>
+          <p:cNvPr id="60" name="TextBox 59"/>
           <p:cNvSpPr txBox="1"/>
           <p:nvPr/>
         </p:nvSpPr>
@@ -5616,7 +5651,7 @@
       </p:sp>
       <p:cxnSp>
         <p:nvCxnSpPr>
-          <p:cNvPr id="60" name="Connector 59"/>
+          <p:cNvPr id="61" name="Connector 60"/>
           <p:cNvCxnSpPr/>
           <p:nvPr/>
         </p:nvCxnSpPr>
@@ -5651,14 +5686,14 @@
       </p:cxnSp>
       <p:sp>
         <p:nvSpPr>
-          <p:cNvPr id="61" name="TextBox 60"/>
+          <p:cNvPr id="62" name="TextBox 61"/>
           <p:cNvSpPr txBox="1"/>
           <p:nvPr/>
         </p:nvSpPr>
         <p:spPr>
           <a:xfrm>
             <a:off x="360000" y="6353999"/>
-            <a:ext cx="8640000" cy="324000"/>
+            <a:ext cx="8820000" cy="324000"/>
           </a:xfrm>
           <a:prstGeom prst="rect">
             <a:avLst/>
@@ -5679,14 +5714,26 @@
                 </a:solidFill>
                 <a:latin typeface="微软雅黑"/>
               </a:rPr>
-              <a:t>注：调整后持股比例以经国资监管部门备案的评估结果为准；本图为方案示意。</a:t>
-            </a:r>
-          </a:p>
-        </p:txBody>
-      </p:sp>
-      <p:sp>
-        <p:nvSpPr>
-          <p:cNvPr id="62" name="TextBox 61"/>
+              <a:t>注：本图列示方案一（股权收购）。若采用方案二（收购土地使用权及地上建筑物），燕京啤酒（邢台）有限公司仍由燕京啤酒持有，仅土地、厂房过户至上市主体，宗地四需另行以协议方式安排使用。</a:t>
+            </a:r>
+          </a:p>
+          <a:p>
+            <a:pPr algn="l"/>
+            <a:r>
+              <a:rPr sz="800" b="0">
+                <a:solidFill>
+                  <a:srgbClr val="888888"/>
+                </a:solidFill>
+                <a:latin typeface="微软雅黑"/>
+              </a:rPr>
+              <a:t>调整后持股比例以经国资监管部门备案的评估结果为准，本图为方案示意。</a:t>
+            </a:r>
+          </a:p>
+        </p:txBody>
+      </p:sp>
+      <p:sp>
+        <p:nvSpPr>
+          <p:cNvPr id="63" name="TextBox 62"/>
           <p:cNvSpPr txBox="1"/>
           <p:nvPr/>
         </p:nvSpPr>

--- a/output/燕京中发尽调报告/燕京中发业务架构调整方案-架构调整前后对比.pptx
+++ b/output/燕京中发尽调报告/燕京中发业务架构调整方案-架构调整前后对比.pptx
@@ -3153,7 +3153,7 @@
                 </a:solidFill>
                 <a:latin typeface="微软雅黑"/>
               </a:rPr>
-              <a:t>（土地事项按方案一「收购燕京啤酒（邢台）有限公司100%股权」列示）</a:t>
+              <a:t>（土地事项按方案一「收购燕京啤酒（邢台）有限公司100%股权」列示；本图按股权支付方式绘制，若采用现金支付则发行人股权结构不变）</a:t>
             </a:r>
           </a:p>
         </p:txBody>
@@ -4463,7 +4463,7 @@
                 </a:solidFill>
                 <a:latin typeface="微软雅黑"/>
               </a:rPr>
-              <a:t>1、发行人以自身股权为对价，收购燕京啤酒持有的中发邢台 67% 股权</a:t>
+              <a:t>1、发行人收购燕京啤酒持有的中发邢台 67% 股权</a:t>
             </a:r>
           </a:p>
           <a:p>
@@ -4475,7 +4475,19 @@
                 </a:solidFill>
                 <a:latin typeface="微软雅黑"/>
               </a:rPr>
-              <a:t>2、发行人以自身股权为对价，收购燕京啤酒持有的燕京啤酒（邢台）100% 股权</a:t>
+              <a:t>2、发行人收购燕京啤酒持有的燕京啤酒（邢台）100% 股权</a:t>
+            </a:r>
+          </a:p>
+          <a:p>
+            <a:pPr algn="l"/>
+            <a:r>
+              <a:rPr sz="850" b="0">
+                <a:solidFill>
+                  <a:srgbClr val="153E5C"/>
+                </a:solidFill>
+                <a:latin typeface="微软雅黑"/>
+              </a:rPr>
+              <a:t>   （上述两步的对价均可选股权支付或现金支付，宜统一安排）</a:t>
             </a:r>
           </a:p>
           <a:p>
@@ -5644,7 +5656,19 @@
                 </a:solidFill>
                 <a:latin typeface="微软雅黑"/>
               </a:rPr>
-              <a:t>③ 股权支付比例 100%，可争取企业所得税特殊性税务处理，预计仅产生印花税。</a:t>
+              <a:t>③ 采用股权支付的，股权支付比例 100%，可争取企业所得税特殊性税务处理，预计仅产生印花税；</a:t>
+            </a:r>
+          </a:p>
+          <a:p>
+            <a:pPr algn="l"/>
+            <a:r>
+              <a:rPr sz="900" b="0">
+                <a:solidFill>
+                  <a:srgbClr val="1B7A3D"/>
+                </a:solidFill>
+                <a:latin typeface="微软雅黑"/>
+              </a:rPr>
+              <a:t>   采用现金支付的，转让方按转让所得适用 25% 企业所得税，且发行人需实际支出资金。</a:t>
             </a:r>
           </a:p>
         </p:txBody>
@@ -5657,7 +5681,7 @@
         </p:nvCxnSpPr>
         <p:spPr>
           <a:xfrm>
-            <a:off x="360000" y="6300000"/>
+            <a:off x="360000" y="6228000"/>
             <a:ext cx="11376000" cy="0"/>
           </a:xfrm>
           <a:prstGeom prst="line">
@@ -5692,8 +5716,8 @@
         </p:nvSpPr>
         <p:spPr>
           <a:xfrm>
-            <a:off x="360000" y="6353999"/>
-            <a:ext cx="8820000" cy="324000"/>
+            <a:off x="360000" y="6271200"/>
+            <a:ext cx="8820000" cy="540000"/>
           </a:xfrm>
           <a:prstGeom prst="rect">
             <a:avLst/>
@@ -5714,7 +5738,7 @@
                 </a:solidFill>
                 <a:latin typeface="微软雅黑"/>
               </a:rPr>
-              <a:t>注：本图列示方案一（股权收购）。若采用方案二（收购土地使用权及地上建筑物），燕京啤酒（邢台）有限公司仍由燕京啤酒持有，仅土地、厂房过户至上市主体，宗地四需另行以协议方式安排使用。</a:t>
+              <a:t>注1：本图按股权支付方式绘制，发行人股东持股比例的变动仅发生于该方式下；若对价采用现金支付，发行人注册资本及股权结构不变，三名股东维持 80%／17.5%／2.5%，图中「↑上升／↓稀释」不适用。</a:t>
             </a:r>
           </a:p>
           <a:p>
@@ -5726,7 +5750,19 @@
                 </a:solidFill>
                 <a:latin typeface="微软雅黑"/>
               </a:rPr>
-              <a:t>调整后持股比例以经国资监管部门备案的评估结果为准，本图为方案示意。</a:t>
+              <a:t>注2：土地事项本图列示方案一（收购100%股权）。若采用方案二（收购土地使用权及地上建筑物），燕京啤酒（邢台）有限公司仍由燕京啤酒持有，仅土地、厂房过户至上市主体，宗地四需另行以协议方式安排使用。</a:t>
+            </a:r>
+          </a:p>
+          <a:p>
+            <a:pPr algn="l"/>
+            <a:r>
+              <a:rPr sz="800" b="0">
+                <a:solidFill>
+                  <a:srgbClr val="888888"/>
+                </a:solidFill>
+                <a:latin typeface="微软雅黑"/>
+              </a:rPr>
+              <a:t>注3：调整后持股比例以经国资监管部门备案的评估结果为准，本图为方案示意。</a:t>
             </a:r>
           </a:p>
         </p:txBody>
@@ -5739,7 +5775,7 @@
         </p:nvSpPr>
         <p:spPr>
           <a:xfrm>
-            <a:off x="9360000" y="6353999"/>
+            <a:off x="9360000" y="6271200"/>
             <a:ext cx="2376000" cy="324000"/>
           </a:xfrm>
           <a:prstGeom prst="rect">
